--- a/Japan/Progress/Presentation 7.1.pptx
+++ b/Japan/Progress/Presentation 7.1.pptx
@@ -224,7 +224,7 @@
           <a:p>
             <a:fld id="{4E2EF82B-E016-44BD-B0C4-D5A3DF34FAF9}" type="datetimeFigureOut">
               <a:rPr lang="en-US" smtClean="0"/>
-              <a:t>10/27/2025</a:t>
+              <a:t>11/6/2025</a:t>
             </a:fld>
             <a:endParaRPr lang="en-US"/>
           </a:p>
@@ -671,7 +671,7 @@
             <a:fld id="{1D8BD707-D9CF-40AE-B4C6-C98DA3205C09}" type="datetimeFigureOut">
               <a:rPr lang="en-US" smtClean="0"/>
               <a:pPr/>
-              <a:t>10/27/2025</a:t>
+              <a:t>11/6/2025</a:t>
             </a:fld>
             <a:endParaRPr lang="en-US"/>
           </a:p>
@@ -836,7 +836,7 @@
             <a:fld id="{1D8BD707-D9CF-40AE-B4C6-C98DA3205C09}" type="datetimeFigureOut">
               <a:rPr lang="en-US" smtClean="0"/>
               <a:pPr/>
-              <a:t>10/27/2025</a:t>
+              <a:t>11/6/2025</a:t>
             </a:fld>
             <a:endParaRPr lang="en-US"/>
           </a:p>
@@ -1011,7 +1011,7 @@
             <a:fld id="{1D8BD707-D9CF-40AE-B4C6-C98DA3205C09}" type="datetimeFigureOut">
               <a:rPr lang="en-US" smtClean="0"/>
               <a:pPr/>
-              <a:t>10/27/2025</a:t>
+              <a:t>11/6/2025</a:t>
             </a:fld>
             <a:endParaRPr lang="en-US"/>
           </a:p>
@@ -1176,7 +1176,7 @@
             <a:fld id="{1D8BD707-D9CF-40AE-B4C6-C98DA3205C09}" type="datetimeFigureOut">
               <a:rPr lang="en-US" smtClean="0"/>
               <a:pPr/>
-              <a:t>10/27/2025</a:t>
+              <a:t>11/6/2025</a:t>
             </a:fld>
             <a:endParaRPr lang="en-US"/>
           </a:p>
@@ -1418,7 +1418,7 @@
             <a:fld id="{1D8BD707-D9CF-40AE-B4C6-C98DA3205C09}" type="datetimeFigureOut">
               <a:rPr lang="en-US" smtClean="0"/>
               <a:pPr/>
-              <a:t>10/27/2025</a:t>
+              <a:t>11/6/2025</a:t>
             </a:fld>
             <a:endParaRPr lang="en-US"/>
           </a:p>
@@ -1700,7 +1700,7 @@
             <a:fld id="{1D8BD707-D9CF-40AE-B4C6-C98DA3205C09}" type="datetimeFigureOut">
               <a:rPr lang="en-US" smtClean="0"/>
               <a:pPr/>
-              <a:t>10/27/2025</a:t>
+              <a:t>11/6/2025</a:t>
             </a:fld>
             <a:endParaRPr lang="en-US"/>
           </a:p>
@@ -2116,7 +2116,7 @@
             <a:fld id="{1D8BD707-D9CF-40AE-B4C6-C98DA3205C09}" type="datetimeFigureOut">
               <a:rPr lang="en-US" smtClean="0"/>
               <a:pPr/>
-              <a:t>10/27/2025</a:t>
+              <a:t>11/6/2025</a:t>
             </a:fld>
             <a:endParaRPr lang="en-US"/>
           </a:p>
@@ -2230,7 +2230,7 @@
             <a:fld id="{1D8BD707-D9CF-40AE-B4C6-C98DA3205C09}" type="datetimeFigureOut">
               <a:rPr lang="en-US" smtClean="0"/>
               <a:pPr/>
-              <a:t>10/27/2025</a:t>
+              <a:t>11/6/2025</a:t>
             </a:fld>
             <a:endParaRPr lang="en-US"/>
           </a:p>
@@ -2322,7 +2322,7 @@
             <a:fld id="{1D8BD707-D9CF-40AE-B4C6-C98DA3205C09}" type="datetimeFigureOut">
               <a:rPr lang="en-US" smtClean="0"/>
               <a:pPr/>
-              <a:t>10/27/2025</a:t>
+              <a:t>11/6/2025</a:t>
             </a:fld>
             <a:endParaRPr lang="en-US"/>
           </a:p>
@@ -2594,7 +2594,7 @@
             <a:fld id="{1D8BD707-D9CF-40AE-B4C6-C98DA3205C09}" type="datetimeFigureOut">
               <a:rPr lang="en-US" smtClean="0"/>
               <a:pPr/>
-              <a:t>10/27/2025</a:t>
+              <a:t>11/6/2025</a:t>
             </a:fld>
             <a:endParaRPr lang="en-US"/>
           </a:p>
@@ -2843,7 +2843,7 @@
             <a:fld id="{1D8BD707-D9CF-40AE-B4C6-C98DA3205C09}" type="datetimeFigureOut">
               <a:rPr lang="en-US" smtClean="0"/>
               <a:pPr/>
-              <a:t>10/27/2025</a:t>
+              <a:t>11/6/2025</a:t>
             </a:fld>
             <a:endParaRPr lang="en-US"/>
           </a:p>
@@ -3051,7 +3051,7 @@
             <a:fld id="{1D8BD707-D9CF-40AE-B4C6-C98DA3205C09}" type="datetimeFigureOut">
               <a:rPr lang="en-US" smtClean="0"/>
               <a:pPr/>
-              <a:t>10/27/2025</a:t>
+              <a:t>11/6/2025</a:t>
             </a:fld>
             <a:endParaRPr lang="en-US"/>
           </a:p>
@@ -3485,8 +3485,8 @@
         </p:nvSpPr>
         <p:spPr>
           <a:xfrm>
-            <a:off x="2865776" y="2843997"/>
-            <a:ext cx="12556447" cy="2484334"/>
+            <a:off x="2613987" y="2765510"/>
+            <a:ext cx="13060024" cy="2484334"/>
           </a:xfrm>
           <a:prstGeom prst="rect">
             <a:avLst/>
@@ -3513,7 +3513,7 @@
                 <a:cs typeface="DM Serif Display"/>
                 <a:sym typeface="DM Serif Display"/>
               </a:rPr>
-              <a:t>Presentation V</a:t>
+              <a:t>Presentation VII</a:t>
             </a:r>
           </a:p>
         </p:txBody>
@@ -3624,8 +3624,8 @@
         </p:nvSpPr>
         <p:spPr>
           <a:xfrm>
-            <a:off x="5412408" y="4905799"/>
-            <a:ext cx="7463182" cy="577081"/>
+            <a:off x="7011503" y="4893857"/>
+            <a:ext cx="4264992" cy="577081"/>
           </a:xfrm>
           <a:prstGeom prst="rect">
             <a:avLst/>
@@ -3652,7 +3652,7 @@
                 <a:cs typeface="Times New Roman" panose="02020603050405020304" pitchFamily="18" charset="0"/>
                 <a:sym typeface="Open Sauce"/>
               </a:rPr>
-              <a:t>Integrating Sphere Required list</a:t>
+              <a:t>Literature Review</a:t>
             </a:r>
           </a:p>
         </p:txBody>
